--- a/מצגת-טק-בגובה-העיניים.pptx
+++ b/מצגת-טק-בגובה-העיניים.pptx
@@ -3269,6 +3269,7 @@
                   <a:srgbClr val="FFFFFF"/>
                 </a:solidFill>
                 <a:latin typeface="Rubik"/>
+                <a:cs typeface="Rubik"/>
               </a:rPr>
               <a:t>טק בגובה העיניים</a:t>
             </a:r>
@@ -3304,6 +3305,7 @@
                   <a:srgbClr val="9CC7F5"/>
                 </a:solidFill>
                 <a:latin typeface="Rubik"/>
+                <a:cs typeface="Rubik"/>
               </a:rPr>
               <a:t>שיעורי טכנולוגיה בבית שלכם</a:t>
             </a:r>
@@ -3339,6 +3341,7 @@
                   <a:srgbClr val="FFFFFF"/>
                 </a:solidFill>
                 <a:latin typeface="Rubik"/>
+                <a:cs typeface="Rubik"/>
               </a:rPr>
               <a:t>דנה קוניק</a:t>
             </a:r>
@@ -3359,7 +3362,7 @@
     <p:bg>
       <p:bgPr>
         <a:solidFill>
-          <a:srgbClr val="FFFFFF"/>
+          <a:srgbClr val="F4F7FB"/>
         </a:solidFill>
         <a:effectLst/>
       </p:bgPr>
@@ -3400,6 +3403,7 @@
                   <a:srgbClr val="0F2E52"/>
                 </a:solidFill>
                 <a:latin typeface="Rubik"/>
+                <a:cs typeface="Rubik"/>
               </a:rPr>
               <a:t>מכירים את זה?</a:t>
             </a:r>
@@ -3423,14 +3427,20 @@
             </a:avLst>
           </a:prstGeom>
           <a:solidFill>
-            <a:srgbClr val="F7F9FC"/>
+            <a:srgbClr val="FFFFFF"/>
           </a:solidFill>
           <a:ln w="12700">
             <a:solidFill>
               <a:srgbClr val="E4EAF1"/>
             </a:solidFill>
           </a:ln>
-          <a:effectLst/>
+          <a:effectLst>
+            <a:outerShdw blurRad="114300" dist="25400" dir="5400000" rotWithShape="0">
+              <a:srgbClr val="0F2E52">
+                <a:alpha val="8000"/>
+              </a:srgbClr>
+            </a:outerShdw>
+          </a:effectLst>
         </p:spPr>
         <p:style>
           <a:lnRef idx="1">
@@ -3495,10 +3505,6 @@
           <a:lstStyle/>
           <a:p>
             <a:pPr algn="ctr"/>
-            <a:r>
-              <a:rPr sz="2600"/>
-              <a:t>📱</a:t>
-            </a:r>
           </a:p>
         </p:txBody>
       </p:sp>
@@ -3531,6 +3537,7 @@
                   <a:srgbClr val="121213"/>
                 </a:solidFill>
                 <a:latin typeface="Rubik"/>
+                <a:cs typeface="Rubik"/>
               </a:rPr>
               <a:t>הסמארטפון מבלבל — לא ברור מה כל כפתור עושה</a:t>
             </a:r>
@@ -3554,14 +3561,20 @@
             </a:avLst>
           </a:prstGeom>
           <a:solidFill>
-            <a:srgbClr val="F7F9FC"/>
+            <a:srgbClr val="FFFFFF"/>
           </a:solidFill>
           <a:ln w="12700">
             <a:solidFill>
               <a:srgbClr val="E4EAF1"/>
             </a:solidFill>
           </a:ln>
-          <a:effectLst/>
+          <a:effectLst>
+            <a:outerShdw blurRad="114300" dist="25400" dir="5400000" rotWithShape="0">
+              <a:srgbClr val="0F2E52">
+                <a:alpha val="8000"/>
+              </a:srgbClr>
+            </a:outerShdw>
+          </a:effectLst>
         </p:spPr>
         <p:style>
           <a:lnRef idx="1">
@@ -3626,10 +3639,6 @@
           <a:lstStyle/>
           <a:p>
             <a:pPr algn="ctr"/>
-            <a:r>
-              <a:rPr sz="2600"/>
-              <a:t>📹</a:t>
-            </a:r>
           </a:p>
         </p:txBody>
       </p:sp>
@@ -3662,6 +3671,7 @@
                   <a:srgbClr val="121213"/>
                 </a:solidFill>
                 <a:latin typeface="Rubik"/>
+                <a:cs typeface="Rubik"/>
               </a:rPr>
               <a:t>רוצים לראות את הנכדים בווידאו, ולא יודעים איך</a:t>
             </a:r>
@@ -3685,14 +3695,20 @@
             </a:avLst>
           </a:prstGeom>
           <a:solidFill>
-            <a:srgbClr val="F7F9FC"/>
+            <a:srgbClr val="FFFFFF"/>
           </a:solidFill>
           <a:ln w="12700">
             <a:solidFill>
               <a:srgbClr val="E4EAF1"/>
             </a:solidFill>
           </a:ln>
-          <a:effectLst/>
+          <a:effectLst>
+            <a:outerShdw blurRad="114300" dist="25400" dir="5400000" rotWithShape="0">
+              <a:srgbClr val="0F2E52">
+                <a:alpha val="8000"/>
+              </a:srgbClr>
+            </a:outerShdw>
+          </a:effectLst>
         </p:spPr>
         <p:style>
           <a:lnRef idx="1">
@@ -3757,10 +3773,6 @@
           <a:lstStyle/>
           <a:p>
             <a:pPr algn="ctr"/>
-            <a:r>
-              <a:rPr sz="2600"/>
-              <a:t>💊</a:t>
-            </a:r>
           </a:p>
         </p:txBody>
       </p:sp>
@@ -3793,6 +3805,7 @@
                   <a:srgbClr val="121213"/>
                 </a:solidFill>
                 <a:latin typeface="Rubik"/>
+                <a:cs typeface="Rubik"/>
               </a:rPr>
               <a:t>רוצים להזמין תרופות מהבית, בלי לצאת</a:t>
             </a:r>
@@ -3816,14 +3829,20 @@
             </a:avLst>
           </a:prstGeom>
           <a:solidFill>
-            <a:srgbClr val="F7F9FC"/>
+            <a:srgbClr val="FFFFFF"/>
           </a:solidFill>
           <a:ln w="12700">
             <a:solidFill>
               <a:srgbClr val="E4EAF1"/>
             </a:solidFill>
           </a:ln>
-          <a:effectLst/>
+          <a:effectLst>
+            <a:outerShdw blurRad="114300" dist="25400" dir="5400000" rotWithShape="0">
+              <a:srgbClr val="0F2E52">
+                <a:alpha val="8000"/>
+              </a:srgbClr>
+            </a:outerShdw>
+          </a:effectLst>
         </p:spPr>
         <p:style>
           <a:lnRef idx="1">
@@ -3888,10 +3907,6 @@
           <a:lstStyle/>
           <a:p>
             <a:pPr algn="ctr"/>
-            <a:r>
-              <a:rPr sz="2600"/>
-              <a:t>🏥</a:t>
-            </a:r>
           </a:p>
         </p:txBody>
       </p:sp>
@@ -3924,6 +3939,7 @@
                   <a:srgbClr val="121213"/>
                 </a:solidFill>
                 <a:latin typeface="Rubik"/>
+                <a:cs typeface="Rubik"/>
               </a:rPr>
               <a:t>קיבלתם תור בקופת חולים, ולא ידעתם איך לאשר אותו באתר</a:t>
             </a:r>
@@ -3947,14 +3963,20 @@
             </a:avLst>
           </a:prstGeom>
           <a:solidFill>
-            <a:srgbClr val="F7F9FC"/>
+            <a:srgbClr val="FFFFFF"/>
           </a:solidFill>
           <a:ln w="12700">
             <a:solidFill>
               <a:srgbClr val="E4EAF1"/>
             </a:solidFill>
           </a:ln>
-          <a:effectLst/>
+          <a:effectLst>
+            <a:outerShdw blurRad="114300" dist="25400" dir="5400000" rotWithShape="0">
+              <a:srgbClr val="0F2E52">
+                <a:alpha val="8000"/>
+              </a:srgbClr>
+            </a:outerShdw>
+          </a:effectLst>
         </p:spPr>
         <p:style>
           <a:lnRef idx="1">
@@ -4019,10 +4041,6 @@
           <a:lstStyle/>
           <a:p>
             <a:pPr algn="ctr"/>
-            <a:r>
-              <a:rPr sz="2600"/>
-              <a:t>⚠</a:t>
-            </a:r>
           </a:p>
         </p:txBody>
       </p:sp>
@@ -4055,6 +4073,7 @@
                   <a:srgbClr val="121213"/>
                 </a:solidFill>
                 <a:latin typeface="Rubik"/>
+                <a:cs typeface="Rubik"/>
               </a:rPr>
               <a:t>קיבלתם הודעה מוזרה וחששתם שזו הונאה</a:t>
             </a:r>
@@ -4078,14 +4097,20 @@
             </a:avLst>
           </a:prstGeom>
           <a:solidFill>
-            <a:srgbClr val="F7F9FC"/>
+            <a:srgbClr val="FFFFFF"/>
           </a:solidFill>
           <a:ln w="12700">
             <a:solidFill>
               <a:srgbClr val="E4EAF1"/>
             </a:solidFill>
           </a:ln>
-          <a:effectLst/>
+          <a:effectLst>
+            <a:outerShdw blurRad="114300" dist="25400" dir="5400000" rotWithShape="0">
+              <a:srgbClr val="0F2E52">
+                <a:alpha val="8000"/>
+              </a:srgbClr>
+            </a:outerShdw>
+          </a:effectLst>
         </p:spPr>
         <p:style>
           <a:lnRef idx="1">
@@ -4150,10 +4175,6 @@
           <a:lstStyle/>
           <a:p>
             <a:pPr algn="ctr"/>
-            <a:r>
-              <a:rPr sz="2600"/>
-              <a:t>📸</a:t>
-            </a:r>
           </a:p>
         </p:txBody>
       </p:sp>
@@ -4186,12 +4207,157 @@
                   <a:srgbClr val="121213"/>
                 </a:solidFill>
                 <a:latin typeface="Rubik"/>
+                <a:cs typeface="Rubik"/>
               </a:rPr>
               <a:t>רוצים לראות תמונות שהמשפחה שולחת, ולא מוצאים איך</a:t>
             </a:r>
           </a:p>
         </p:txBody>
       </p:sp>
+      <p:pic>
+        <p:nvPicPr>
+          <p:cNvPr id="21" name="Picture 20" descr="smartphone.png"/>
+          <p:cNvPicPr>
+            <a:picLocks noChangeAspect="1"/>
+          </p:cNvPicPr>
+          <p:nvPr/>
+        </p:nvPicPr>
+        <p:blipFill>
+          <a:blip r:embed="rId2"/>
+          <a:stretch>
+            <a:fillRect/>
+          </a:stretch>
+        </p:blipFill>
+        <p:spPr>
+          <a:xfrm>
+            <a:off x="5177790" y="1840230"/>
+            <a:ext cx="388620" cy="388620"/>
+          </a:xfrm>
+          <a:prstGeom prst="rect">
+            <a:avLst/>
+          </a:prstGeom>
+        </p:spPr>
+      </p:pic>
+      <p:pic>
+        <p:nvPicPr>
+          <p:cNvPr id="22" name="Picture 21" descr="video.png"/>
+          <p:cNvPicPr>
+            <a:picLocks noChangeAspect="1"/>
+          </p:cNvPicPr>
+          <p:nvPr/>
+        </p:nvPicPr>
+        <p:blipFill>
+          <a:blip r:embed="rId3"/>
+          <a:stretch>
+            <a:fillRect/>
+          </a:stretch>
+        </p:blipFill>
+        <p:spPr>
+          <a:xfrm>
+            <a:off x="10801350" y="1840230"/>
+            <a:ext cx="388620" cy="388620"/>
+          </a:xfrm>
+          <a:prstGeom prst="rect">
+            <a:avLst/>
+          </a:prstGeom>
+        </p:spPr>
+      </p:pic>
+      <p:pic>
+        <p:nvPicPr>
+          <p:cNvPr id="23" name="Picture 22" descr="pill.png"/>
+          <p:cNvPicPr>
+            <a:picLocks noChangeAspect="1"/>
+          </p:cNvPicPr>
+          <p:nvPr/>
+        </p:nvPicPr>
+        <p:blipFill>
+          <a:blip r:embed="rId4"/>
+          <a:stretch>
+            <a:fillRect/>
+          </a:stretch>
+        </p:blipFill>
+        <p:spPr>
+          <a:xfrm>
+            <a:off x="5177790" y="3531870"/>
+            <a:ext cx="388620" cy="388620"/>
+          </a:xfrm>
+          <a:prstGeom prst="rect">
+            <a:avLst/>
+          </a:prstGeom>
+        </p:spPr>
+      </p:pic>
+      <p:pic>
+        <p:nvPicPr>
+          <p:cNvPr id="24" name="Picture 23" descr="hospital.png"/>
+          <p:cNvPicPr>
+            <a:picLocks noChangeAspect="1"/>
+          </p:cNvPicPr>
+          <p:nvPr/>
+        </p:nvPicPr>
+        <p:blipFill>
+          <a:blip r:embed="rId5"/>
+          <a:stretch>
+            <a:fillRect/>
+          </a:stretch>
+        </p:blipFill>
+        <p:spPr>
+          <a:xfrm>
+            <a:off x="10801350" y="3531870"/>
+            <a:ext cx="388620" cy="388620"/>
+          </a:xfrm>
+          <a:prstGeom prst="rect">
+            <a:avLst/>
+          </a:prstGeom>
+        </p:spPr>
+      </p:pic>
+      <p:pic>
+        <p:nvPicPr>
+          <p:cNvPr id="25" name="Picture 24" descr="warning.png"/>
+          <p:cNvPicPr>
+            <a:picLocks noChangeAspect="1"/>
+          </p:cNvPicPr>
+          <p:nvPr/>
+        </p:nvPicPr>
+        <p:blipFill>
+          <a:blip r:embed="rId6"/>
+          <a:stretch>
+            <a:fillRect/>
+          </a:stretch>
+        </p:blipFill>
+        <p:spPr>
+          <a:xfrm>
+            <a:off x="5177790" y="5223510"/>
+            <a:ext cx="388620" cy="388620"/>
+          </a:xfrm>
+          <a:prstGeom prst="rect">
+            <a:avLst/>
+          </a:prstGeom>
+        </p:spPr>
+      </p:pic>
+      <p:pic>
+        <p:nvPicPr>
+          <p:cNvPr id="26" name="Picture 25" descr="camera.png"/>
+          <p:cNvPicPr>
+            <a:picLocks noChangeAspect="1"/>
+          </p:cNvPicPr>
+          <p:nvPr/>
+        </p:nvPicPr>
+        <p:blipFill>
+          <a:blip r:embed="rId7"/>
+          <a:stretch>
+            <a:fillRect/>
+          </a:stretch>
+        </p:blipFill>
+        <p:spPr>
+          <a:xfrm>
+            <a:off x="10801350" y="5223510"/>
+            <a:ext cx="388620" cy="388620"/>
+          </a:xfrm>
+          <a:prstGeom prst="rect">
+            <a:avLst/>
+          </a:prstGeom>
+        </p:spPr>
+      </p:pic>
     </p:spTree>
   </p:cSld>
   <p:clrMapOvr>
@@ -4247,6 +4413,7 @@
                   <a:srgbClr val="FFFFFF"/>
                 </a:solidFill>
                 <a:latin typeface="Rubik"/>
+                <a:cs typeface="Rubik"/>
               </a:rPr>
               <a:t>אני באה אליכם</a:t>
             </a:r>
@@ -4282,6 +4449,7 @@
                   <a:srgbClr val="9CC7F5"/>
                 </a:solidFill>
                 <a:latin typeface="Rubik"/>
+                <a:cs typeface="Rubik"/>
               </a:rPr>
               <a:t>הבית שלכם — לא מרפאה ולא כיתה</a:t>
             </a:r>
@@ -4317,6 +4485,7 @@
                   <a:srgbClr val="9CC7F5"/>
                 </a:solidFill>
                 <a:latin typeface="Rubik"/>
+                <a:cs typeface="Rubik"/>
               </a:rPr>
               <a:t>בקצב שלכם, בלי לחץ ובלי שיפוט</a:t>
             </a:r>
@@ -4352,6 +4521,7 @@
                   <a:srgbClr val="9CC7F5"/>
                 </a:solidFill>
                 <a:latin typeface="Rubik"/>
+                <a:cs typeface="Rubik"/>
               </a:rPr>
               <a:t>חוזרים על כל דבר כמה פעמים שצריך</a:t>
             </a:r>
@@ -4372,7 +4542,7 @@
     <p:bg>
       <p:bgPr>
         <a:solidFill>
-          <a:srgbClr val="FFFFFF"/>
+          <a:srgbClr val="F4F7FB"/>
         </a:solidFill>
         <a:effectLst/>
       </p:bgPr>
@@ -4413,6 +4583,7 @@
                   <a:srgbClr val="0F2E52"/>
                 </a:solidFill>
                 <a:latin typeface="Rubik"/>
+                <a:cs typeface="Rubik"/>
               </a:rPr>
               <a:t>מה לומדים איתי?</a:t>
             </a:r>
@@ -4436,14 +4607,20 @@
             </a:avLst>
           </a:prstGeom>
           <a:solidFill>
-            <a:srgbClr val="F7F9FC"/>
+            <a:srgbClr val="FFFFFF"/>
           </a:solidFill>
           <a:ln w="12700">
             <a:solidFill>
               <a:srgbClr val="E4EAF1"/>
             </a:solidFill>
           </a:ln>
-          <a:effectLst/>
+          <a:effectLst>
+            <a:outerShdw blurRad="114300" dist="25400" dir="5400000" rotWithShape="0">
+              <a:srgbClr val="0F2E52">
+                <a:alpha val="8000"/>
+              </a:srgbClr>
+            </a:outerShdw>
+          </a:effectLst>
         </p:spPr>
         <p:style>
           <a:lnRef idx="1">
@@ -4482,7 +4659,7 @@
             <a:avLst/>
           </a:prstGeom>
           <a:solidFill>
-            <a:srgbClr val="FFFFFF"/>
+            <a:srgbClr val="EAF7F1"/>
           </a:solidFill>
           <a:ln>
             <a:noFill/>
@@ -4508,10 +4685,6 @@
           <a:lstStyle/>
           <a:p>
             <a:pPr algn="ctr"/>
-            <a:r>
-              <a:rPr sz="2400"/>
-              <a:t>📱</a:t>
-            </a:r>
           </a:p>
         </p:txBody>
       </p:sp>
@@ -4539,13 +4712,25 @@
           <a:p>
             <a:pPr algn="r" rtl="1"/>
             <a:r>
-              <a:rPr sz="1800" b="1" i="0">
+              <a:rPr sz="1500" b="1" i="0">
                 <a:solidFill>
                   <a:srgbClr val="121213"/>
                 </a:solidFill>
                 <a:latin typeface="Rubik"/>
+                <a:cs typeface="Rubik"/>
               </a:rPr>
               <a:t>סמארטפון בסיסי</a:t>
+            </a:r>
+          </a:p>
+          <a:p>
+            <a:pPr algn="r" rtl="1"/>
+            <a:r>
+              <a:rPr sz="1050" b="0">
+                <a:solidFill>
+                  <a:srgbClr val="6A6D70"/>
+                </a:solidFill>
+              </a:rPr>
+              <a:t>פתיחת אפליקציות, שיחות והודעות</a:t>
             </a:r>
           </a:p>
         </p:txBody>
@@ -4567,14 +4752,20 @@
             </a:avLst>
           </a:prstGeom>
           <a:solidFill>
-            <a:srgbClr val="F7F9FC"/>
+            <a:srgbClr val="FFFFFF"/>
           </a:solidFill>
           <a:ln w="12700">
             <a:solidFill>
               <a:srgbClr val="E4EAF1"/>
             </a:solidFill>
           </a:ln>
-          <a:effectLst/>
+          <a:effectLst>
+            <a:outerShdw blurRad="114300" dist="25400" dir="5400000" rotWithShape="0">
+              <a:srgbClr val="0F2E52">
+                <a:alpha val="8000"/>
+              </a:srgbClr>
+            </a:outerShdw>
+          </a:effectLst>
         </p:spPr>
         <p:style>
           <a:lnRef idx="1">
@@ -4613,7 +4804,7 @@
             <a:avLst/>
           </a:prstGeom>
           <a:solidFill>
-            <a:srgbClr val="FFFFFF"/>
+            <a:srgbClr val="EAF7F1"/>
           </a:solidFill>
           <a:ln>
             <a:noFill/>
@@ -4639,10 +4830,6 @@
           <a:lstStyle/>
           <a:p>
             <a:pPr algn="ctr"/>
-            <a:r>
-              <a:rPr sz="2400"/>
-              <a:t>📹</a:t>
-            </a:r>
           </a:p>
         </p:txBody>
       </p:sp>
@@ -4670,13 +4857,25 @@
           <a:p>
             <a:pPr algn="r" rtl="1"/>
             <a:r>
-              <a:rPr sz="1800" b="1" i="0">
+              <a:rPr sz="1500" b="1" i="0">
                 <a:solidFill>
                   <a:srgbClr val="121213"/>
                 </a:solidFill>
                 <a:latin typeface="Rubik"/>
+                <a:cs typeface="Rubik"/>
               </a:rPr>
               <a:t>וידאו-שיחות עם המשפחה</a:t>
+            </a:r>
+          </a:p>
+          <a:p>
+            <a:pPr algn="r" rtl="1"/>
+            <a:r>
+              <a:rPr sz="1050" b="0">
+                <a:solidFill>
+                  <a:srgbClr val="6A6D70"/>
+                </a:solidFill>
+              </a:rPr>
+              <a:t>רואים ומדברים עם הנכדים, בלי לחץ</a:t>
             </a:r>
           </a:p>
         </p:txBody>
@@ -4698,14 +4897,20 @@
             </a:avLst>
           </a:prstGeom>
           <a:solidFill>
-            <a:srgbClr val="F7F9FC"/>
+            <a:srgbClr val="FFFFFF"/>
           </a:solidFill>
           <a:ln w="12700">
             <a:solidFill>
               <a:srgbClr val="E4EAF1"/>
             </a:solidFill>
           </a:ln>
-          <a:effectLst/>
+          <a:effectLst>
+            <a:outerShdw blurRad="114300" dist="25400" dir="5400000" rotWithShape="0">
+              <a:srgbClr val="0F2E52">
+                <a:alpha val="8000"/>
+              </a:srgbClr>
+            </a:outerShdw>
+          </a:effectLst>
         </p:spPr>
         <p:style>
           <a:lnRef idx="1">
@@ -4744,7 +4949,7 @@
             <a:avLst/>
           </a:prstGeom>
           <a:solidFill>
-            <a:srgbClr val="FFFFFF"/>
+            <a:srgbClr val="EAF7F1"/>
           </a:solidFill>
           <a:ln>
             <a:noFill/>
@@ -4770,10 +4975,6 @@
           <a:lstStyle/>
           <a:p>
             <a:pPr algn="ctr"/>
-            <a:r>
-              <a:rPr sz="2400"/>
-              <a:t>📸</a:t>
-            </a:r>
           </a:p>
         </p:txBody>
       </p:sp>
@@ -4801,13 +5002,25 @@
           <a:p>
             <a:pPr algn="r" rtl="1"/>
             <a:r>
-              <a:rPr sz="1800" b="1" i="0">
+              <a:rPr sz="1500" b="1" i="0">
                 <a:solidFill>
                   <a:srgbClr val="121213"/>
                 </a:solidFill>
                 <a:latin typeface="Rubik"/>
+                <a:cs typeface="Rubik"/>
               </a:rPr>
               <a:t>תמונות ואחסון</a:t>
+            </a:r>
+          </a:p>
+          <a:p>
+            <a:pPr algn="r" rtl="1"/>
+            <a:r>
+              <a:rPr sz="1050" b="0">
+                <a:solidFill>
+                  <a:srgbClr val="6A6D70"/>
+                </a:solidFill>
+              </a:rPr>
+              <a:t>מצלמים, שומרים ומוצאים תמונות בקלות</a:t>
             </a:r>
           </a:p>
         </p:txBody>
@@ -4829,14 +5042,20 @@
             </a:avLst>
           </a:prstGeom>
           <a:solidFill>
-            <a:srgbClr val="F7F9FC"/>
+            <a:srgbClr val="FFFFFF"/>
           </a:solidFill>
           <a:ln w="12700">
             <a:solidFill>
               <a:srgbClr val="E4EAF1"/>
             </a:solidFill>
           </a:ln>
-          <a:effectLst/>
+          <a:effectLst>
+            <a:outerShdw blurRad="114300" dist="25400" dir="5400000" rotWithShape="0">
+              <a:srgbClr val="0F2E52">
+                <a:alpha val="8000"/>
+              </a:srgbClr>
+            </a:outerShdw>
+          </a:effectLst>
         </p:spPr>
         <p:style>
           <a:lnRef idx="1">
@@ -4875,7 +5094,7 @@
             <a:avLst/>
           </a:prstGeom>
           <a:solidFill>
-            <a:srgbClr val="FFFFFF"/>
+            <a:srgbClr val="EAF7F1"/>
           </a:solidFill>
           <a:ln>
             <a:noFill/>
@@ -4901,10 +5120,6 @@
           <a:lstStyle/>
           <a:p>
             <a:pPr algn="ctr"/>
-            <a:r>
-              <a:rPr sz="2400"/>
-              <a:t>🔍</a:t>
-            </a:r>
           </a:p>
         </p:txBody>
       </p:sp>
@@ -4932,13 +5147,25 @@
           <a:p>
             <a:pPr algn="r" rtl="1"/>
             <a:r>
-              <a:rPr sz="1800" b="1" i="0">
+              <a:rPr sz="1500" b="1" i="0">
                 <a:solidFill>
                   <a:srgbClr val="121213"/>
                 </a:solidFill>
                 <a:latin typeface="Rubik"/>
+                <a:cs typeface="Rubik"/>
               </a:rPr>
               <a:t>גלישה וחיפוש בטוח</a:t>
+            </a:r>
+          </a:p>
+          <a:p>
+            <a:pPr algn="r" rtl="1"/>
+            <a:r>
+              <a:rPr sz="1050" b="0">
+                <a:solidFill>
+                  <a:srgbClr val="6A6D70"/>
+                </a:solidFill>
+              </a:rPr>
+              <a:t>מוצאים מידע באינטרנט בביטחון</a:t>
             </a:r>
           </a:p>
         </p:txBody>
@@ -4960,14 +5187,20 @@
             </a:avLst>
           </a:prstGeom>
           <a:solidFill>
-            <a:srgbClr val="F7F9FC"/>
+            <a:srgbClr val="FFFFFF"/>
           </a:solidFill>
           <a:ln w="12700">
             <a:solidFill>
               <a:srgbClr val="E4EAF1"/>
             </a:solidFill>
           </a:ln>
-          <a:effectLst/>
+          <a:effectLst>
+            <a:outerShdw blurRad="114300" dist="25400" dir="5400000" rotWithShape="0">
+              <a:srgbClr val="0F2E52">
+                <a:alpha val="8000"/>
+              </a:srgbClr>
+            </a:outerShdw>
+          </a:effectLst>
         </p:spPr>
         <p:style>
           <a:lnRef idx="1">
@@ -5006,7 +5239,7 @@
             <a:avLst/>
           </a:prstGeom>
           <a:solidFill>
-            <a:srgbClr val="FFFFFF"/>
+            <a:srgbClr val="EAF7F1"/>
           </a:solidFill>
           <a:ln>
             <a:noFill/>
@@ -5032,10 +5265,6 @@
           <a:lstStyle/>
           <a:p>
             <a:pPr algn="ctr"/>
-            <a:r>
-              <a:rPr sz="2400"/>
-              <a:t>🏥</a:t>
-            </a:r>
           </a:p>
         </p:txBody>
       </p:sp>
@@ -5063,13 +5292,25 @@
           <a:p>
             <a:pPr algn="r" rtl="1"/>
             <a:r>
-              <a:rPr sz="1800" b="1" i="0">
+              <a:rPr sz="1500" b="1" i="0">
                 <a:solidFill>
                   <a:srgbClr val="121213"/>
                 </a:solidFill>
                 <a:latin typeface="Rubik"/>
+                <a:cs typeface="Rubik"/>
               </a:rPr>
               <a:t>אפליקציית קופת חולים ותרופות</a:t>
+            </a:r>
+          </a:p>
+          <a:p>
+            <a:pPr algn="r" rtl="1"/>
+            <a:r>
+              <a:rPr sz="1050" b="0">
+                <a:solidFill>
+                  <a:srgbClr val="6A6D70"/>
+                </a:solidFill>
+              </a:rPr>
+              <a:t>תורים, מרשמים והזמנת תרופות מהבית</a:t>
             </a:r>
           </a:p>
         </p:txBody>
@@ -5091,14 +5332,20 @@
             </a:avLst>
           </a:prstGeom>
           <a:solidFill>
-            <a:srgbClr val="F7F9FC"/>
+            <a:srgbClr val="FFFFFF"/>
           </a:solidFill>
           <a:ln w="12700">
             <a:solidFill>
               <a:srgbClr val="E4EAF1"/>
             </a:solidFill>
           </a:ln>
-          <a:effectLst/>
+          <a:effectLst>
+            <a:outerShdw blurRad="114300" dist="25400" dir="5400000" rotWithShape="0">
+              <a:srgbClr val="0F2E52">
+                <a:alpha val="8000"/>
+              </a:srgbClr>
+            </a:outerShdw>
+          </a:effectLst>
         </p:spPr>
         <p:style>
           <a:lnRef idx="1">
@@ -5137,7 +5384,7 @@
             <a:avLst/>
           </a:prstGeom>
           <a:solidFill>
-            <a:srgbClr val="FFFFFF"/>
+            <a:srgbClr val="EAF7F1"/>
           </a:solidFill>
           <a:ln>
             <a:noFill/>
@@ -5163,10 +5410,6 @@
           <a:lstStyle/>
           <a:p>
             <a:pPr algn="ctr"/>
-            <a:r>
-              <a:rPr sz="2400"/>
-              <a:t>🛡</a:t>
-            </a:r>
           </a:p>
         </p:txBody>
       </p:sp>
@@ -5194,13 +5437,25 @@
           <a:p>
             <a:pPr algn="r" rtl="1"/>
             <a:r>
-              <a:rPr sz="1800" b="1" i="0">
+              <a:rPr sz="1500" b="1" i="0">
                 <a:solidFill>
                   <a:srgbClr val="121213"/>
                 </a:solidFill>
                 <a:latin typeface="Rubik"/>
+                <a:cs typeface="Rubik"/>
               </a:rPr>
               <a:t>זהירות מהונאות</a:t>
+            </a:r>
+          </a:p>
+          <a:p>
+            <a:pPr algn="r" rtl="1"/>
+            <a:r>
+              <a:rPr sz="1050" b="0">
+                <a:solidFill>
+                  <a:srgbClr val="6A6D70"/>
+                </a:solidFill>
+              </a:rPr>
+              <a:t>מזהים הודעות ושיחות חשודות</a:t>
             </a:r>
           </a:p>
         </p:txBody>
@@ -5222,14 +5477,20 @@
             </a:avLst>
           </a:prstGeom>
           <a:solidFill>
-            <a:srgbClr val="F7F9FC"/>
+            <a:srgbClr val="FFFFFF"/>
           </a:solidFill>
           <a:ln w="12700">
             <a:solidFill>
               <a:srgbClr val="E4EAF1"/>
             </a:solidFill>
           </a:ln>
-          <a:effectLst/>
+          <a:effectLst>
+            <a:outerShdw blurRad="114300" dist="25400" dir="5400000" rotWithShape="0">
+              <a:srgbClr val="0F2E52">
+                <a:alpha val="8000"/>
+              </a:srgbClr>
+            </a:outerShdw>
+          </a:effectLst>
         </p:spPr>
         <p:style>
           <a:lnRef idx="1">
@@ -5268,7 +5529,7 @@
             <a:avLst/>
           </a:prstGeom>
           <a:solidFill>
-            <a:srgbClr val="FFFFFF"/>
+            <a:srgbClr val="EAF7F1"/>
           </a:solidFill>
           <a:ln>
             <a:noFill/>
@@ -5294,10 +5555,6 @@
           <a:lstStyle/>
           <a:p>
             <a:pPr algn="ctr"/>
-            <a:r>
-              <a:rPr sz="2400"/>
-              <a:t>🤖</a:t>
-            </a:r>
           </a:p>
         </p:txBody>
       </p:sp>
@@ -5325,13 +5582,25 @@
           <a:p>
             <a:pPr algn="r" rtl="1"/>
             <a:r>
-              <a:rPr sz="1800" b="1" i="0">
+              <a:rPr sz="1500" b="1" i="0">
                 <a:solidFill>
                   <a:srgbClr val="121213"/>
                 </a:solidFill>
                 <a:latin typeface="Rubik"/>
+                <a:cs typeface="Rubik"/>
               </a:rPr>
               <a:t>בינה מלאכותית (AI) בסיסי</a:t>
+            </a:r>
+          </a:p>
+          <a:p>
+            <a:pPr algn="r" rtl="1"/>
+            <a:r>
+              <a:rPr sz="1050" b="0">
+                <a:solidFill>
+                  <a:srgbClr val="6A6D70"/>
+                </a:solidFill>
+              </a:rPr>
+              <a:t>היכרות ראשונה עם כלים כמו ChatGPT</a:t>
             </a:r>
           </a:p>
         </p:txBody>
@@ -5353,14 +5622,20 @@
             </a:avLst>
           </a:prstGeom>
           <a:solidFill>
-            <a:srgbClr val="EAF2FD"/>
+            <a:srgbClr val="FFFFFF"/>
           </a:solidFill>
           <a:ln w="12700">
             <a:solidFill>
               <a:srgbClr val="E4EAF1"/>
             </a:solidFill>
           </a:ln>
-          <a:effectLst/>
+          <a:effectLst>
+            <a:outerShdw blurRad="114300" dist="25400" dir="5400000" rotWithShape="0">
+              <a:srgbClr val="0F2E52">
+                <a:alpha val="8000"/>
+              </a:srgbClr>
+            </a:outerShdw>
+          </a:effectLst>
         </p:spPr>
         <p:style>
           <a:lnRef idx="1">
@@ -5399,7 +5674,7 @@
             <a:avLst/>
           </a:prstGeom>
           <a:solidFill>
-            <a:srgbClr val="FFFFFF"/>
+            <a:srgbClr val="EAF7F1"/>
           </a:solidFill>
           <a:ln>
             <a:noFill/>
@@ -5425,10 +5700,6 @@
           <a:lstStyle/>
           <a:p>
             <a:pPr algn="ctr"/>
-            <a:r>
-              <a:rPr sz="2400"/>
-              <a:t>➕</a:t>
-            </a:r>
           </a:p>
         </p:txBody>
       </p:sp>
@@ -5456,17 +5727,221 @@
           <a:p>
             <a:pPr algn="r" rtl="1"/>
             <a:r>
-              <a:rPr sz="1800" b="1" i="0">
+              <a:rPr sz="1500" b="1" i="0">
                 <a:solidFill>
                   <a:srgbClr val="121213"/>
                 </a:solidFill>
                 <a:latin typeface="Rubik"/>
+                <a:cs typeface="Rubik"/>
               </a:rPr>
               <a:t>ועוד, לפי מה שמעניין אתכם</a:t>
             </a:r>
           </a:p>
-        </p:txBody>
-      </p:sp>
+          <a:p>
+            <a:pPr algn="r" rtl="1"/>
+            <a:r>
+              <a:rPr sz="1050" b="0">
+                <a:solidFill>
+                  <a:srgbClr val="6A6D70"/>
+                </a:solidFill>
+              </a:rPr>
+              <a:t>מתאימים את השיעור בדיוק אליכם</a:t>
+            </a:r>
+          </a:p>
+        </p:txBody>
+      </p:sp>
+      <p:pic>
+        <p:nvPicPr>
+          <p:cNvPr id="27" name="Picture 26" descr="smartphone.png"/>
+          <p:cNvPicPr>
+            <a:picLocks noChangeAspect="1"/>
+          </p:cNvPicPr>
+          <p:nvPr/>
+        </p:nvPicPr>
+        <p:blipFill>
+          <a:blip r:embed="rId2"/>
+          <a:stretch>
+            <a:fillRect/>
+          </a:stretch>
+        </p:blipFill>
+        <p:spPr>
+          <a:xfrm>
+            <a:off x="5280660" y="1943100"/>
+            <a:ext cx="320040" cy="320040"/>
+          </a:xfrm>
+          <a:prstGeom prst="rect">
+            <a:avLst/>
+          </a:prstGeom>
+        </p:spPr>
+      </p:pic>
+      <p:pic>
+        <p:nvPicPr>
+          <p:cNvPr id="28" name="Picture 27" descr="video.png"/>
+          <p:cNvPicPr>
+            <a:picLocks noChangeAspect="1"/>
+          </p:cNvPicPr>
+          <p:nvPr/>
+        </p:nvPicPr>
+        <p:blipFill>
+          <a:blip r:embed="rId3"/>
+          <a:stretch>
+            <a:fillRect/>
+          </a:stretch>
+        </p:blipFill>
+        <p:spPr>
+          <a:xfrm>
+            <a:off x="10904220" y="1943100"/>
+            <a:ext cx="320040" cy="320040"/>
+          </a:xfrm>
+          <a:prstGeom prst="rect">
+            <a:avLst/>
+          </a:prstGeom>
+        </p:spPr>
+      </p:pic>
+      <p:pic>
+        <p:nvPicPr>
+          <p:cNvPr id="29" name="Picture 28" descr="camera.png"/>
+          <p:cNvPicPr>
+            <a:picLocks noChangeAspect="1"/>
+          </p:cNvPicPr>
+          <p:nvPr/>
+        </p:nvPicPr>
+        <p:blipFill>
+          <a:blip r:embed="rId4"/>
+          <a:stretch>
+            <a:fillRect/>
+          </a:stretch>
+        </p:blipFill>
+        <p:spPr>
+          <a:xfrm>
+            <a:off x="5280660" y="3268980"/>
+            <a:ext cx="320040" cy="320040"/>
+          </a:xfrm>
+          <a:prstGeom prst="rect">
+            <a:avLst/>
+          </a:prstGeom>
+        </p:spPr>
+      </p:pic>
+      <p:pic>
+        <p:nvPicPr>
+          <p:cNvPr id="30" name="Picture 29" descr="search.png"/>
+          <p:cNvPicPr>
+            <a:picLocks noChangeAspect="1"/>
+          </p:cNvPicPr>
+          <p:nvPr/>
+        </p:nvPicPr>
+        <p:blipFill>
+          <a:blip r:embed="rId5"/>
+          <a:stretch>
+            <a:fillRect/>
+          </a:stretch>
+        </p:blipFill>
+        <p:spPr>
+          <a:xfrm>
+            <a:off x="10904220" y="3268980"/>
+            <a:ext cx="320040" cy="320040"/>
+          </a:xfrm>
+          <a:prstGeom prst="rect">
+            <a:avLst/>
+          </a:prstGeom>
+        </p:spPr>
+      </p:pic>
+      <p:pic>
+        <p:nvPicPr>
+          <p:cNvPr id="31" name="Picture 30" descr="hospital.png"/>
+          <p:cNvPicPr>
+            <a:picLocks noChangeAspect="1"/>
+          </p:cNvPicPr>
+          <p:nvPr/>
+        </p:nvPicPr>
+        <p:blipFill>
+          <a:blip r:embed="rId6"/>
+          <a:stretch>
+            <a:fillRect/>
+          </a:stretch>
+        </p:blipFill>
+        <p:spPr>
+          <a:xfrm>
+            <a:off x="5280660" y="4594860"/>
+            <a:ext cx="320040" cy="320040"/>
+          </a:xfrm>
+          <a:prstGeom prst="rect">
+            <a:avLst/>
+          </a:prstGeom>
+        </p:spPr>
+      </p:pic>
+      <p:pic>
+        <p:nvPicPr>
+          <p:cNvPr id="32" name="Picture 31" descr="shield.png"/>
+          <p:cNvPicPr>
+            <a:picLocks noChangeAspect="1"/>
+          </p:cNvPicPr>
+          <p:nvPr/>
+        </p:nvPicPr>
+        <p:blipFill>
+          <a:blip r:embed="rId7"/>
+          <a:stretch>
+            <a:fillRect/>
+          </a:stretch>
+        </p:blipFill>
+        <p:spPr>
+          <a:xfrm>
+            <a:off x="10904220" y="4594860"/>
+            <a:ext cx="320040" cy="320040"/>
+          </a:xfrm>
+          <a:prstGeom prst="rect">
+            <a:avLst/>
+          </a:prstGeom>
+        </p:spPr>
+      </p:pic>
+      <p:pic>
+        <p:nvPicPr>
+          <p:cNvPr id="33" name="Picture 32" descr="robot.png"/>
+          <p:cNvPicPr>
+            <a:picLocks noChangeAspect="1"/>
+          </p:cNvPicPr>
+          <p:nvPr/>
+        </p:nvPicPr>
+        <p:blipFill>
+          <a:blip r:embed="rId8"/>
+          <a:stretch>
+            <a:fillRect/>
+          </a:stretch>
+        </p:blipFill>
+        <p:spPr>
+          <a:xfrm>
+            <a:off x="5280660" y="5920740"/>
+            <a:ext cx="320040" cy="320040"/>
+          </a:xfrm>
+          <a:prstGeom prst="rect">
+            <a:avLst/>
+          </a:prstGeom>
+        </p:spPr>
+      </p:pic>
+      <p:pic>
+        <p:nvPicPr>
+          <p:cNvPr id="34" name="Picture 33" descr="plus.png"/>
+          <p:cNvPicPr>
+            <a:picLocks noChangeAspect="1"/>
+          </p:cNvPicPr>
+          <p:nvPr/>
+        </p:nvPicPr>
+        <p:blipFill>
+          <a:blip r:embed="rId9"/>
+          <a:stretch>
+            <a:fillRect/>
+          </a:stretch>
+        </p:blipFill>
+        <p:spPr>
+          <a:xfrm>
+            <a:off x="10904220" y="5920740"/>
+            <a:ext cx="320040" cy="320040"/>
+          </a:xfrm>
+          <a:prstGeom prst="rect">
+            <a:avLst/>
+          </a:prstGeom>
+        </p:spPr>
+      </p:pic>
     </p:spTree>
   </p:cSld>
   <p:clrMapOvr>
@@ -5522,6 +5997,7 @@
                   <a:srgbClr val="FFFFFF"/>
                 </a:solidFill>
                 <a:latin typeface="Rubik"/>
+                <a:cs typeface="Rubik"/>
               </a:rPr>
               <a:t>בגובה העיניים</a:t>
             </a:r>
@@ -5557,6 +6033,7 @@
                   <a:srgbClr val="9CC7F5"/>
                 </a:solidFill>
                 <a:latin typeface="Rubik"/>
+                <a:cs typeface="Rubik"/>
               </a:rPr>
               <a:t>בלי ז'רגון. בלי למהר. איפה שאתם נמצאים.</a:t>
             </a:r>
@@ -5576,7 +6053,7 @@
           </a:xfrm>
           <a:prstGeom prst="roundRect">
             <a:avLst>
-              <a:gd name="adj" fmla="val 12000"/>
+              <a:gd name="adj" fmla="val 50000"/>
             </a:avLst>
           </a:prstGeom>
           <a:solidFill>
@@ -5614,6 +6091,7 @@
                   <a:srgbClr val="FFFFFF"/>
                 </a:solidFill>
                 <a:latin typeface="Rubik"/>
+                <a:cs typeface="Rubik"/>
               </a:rPr>
               <a:t>סבלנות</a:t>
             </a:r>
@@ -5633,7 +6111,7 @@
           </a:xfrm>
           <a:prstGeom prst="roundRect">
             <a:avLst>
-              <a:gd name="adj" fmla="val 12000"/>
+              <a:gd name="adj" fmla="val 50000"/>
             </a:avLst>
           </a:prstGeom>
           <a:solidFill>
@@ -5671,6 +6149,7 @@
                   <a:srgbClr val="FFFFFF"/>
                 </a:solidFill>
                 <a:latin typeface="Rubik"/>
+                <a:cs typeface="Rubik"/>
               </a:rPr>
               <a:t>כבוד</a:t>
             </a:r>
@@ -5690,7 +6169,7 @@
           </a:xfrm>
           <a:prstGeom prst="roundRect">
             <a:avLst>
-              <a:gd name="adj" fmla="val 12000"/>
+              <a:gd name="adj" fmla="val 50000"/>
             </a:avLst>
           </a:prstGeom>
           <a:solidFill>
@@ -5728,6 +6207,7 @@
                   <a:srgbClr val="FFFFFF"/>
                 </a:solidFill>
                 <a:latin typeface="Rubik"/>
+                <a:cs typeface="Rubik"/>
               </a:rPr>
               <a:t>הקשבה</a:t>
             </a:r>
@@ -5748,7 +6228,7 @@
     <p:bg>
       <p:bgPr>
         <a:solidFill>
-          <a:srgbClr val="FFFFFF"/>
+          <a:srgbClr val="F4F7FB"/>
         </a:solidFill>
         <a:effectLst/>
       </p:bgPr>
@@ -5789,6 +6269,7 @@
                   <a:srgbClr val="0F2E52"/>
                 </a:solidFill>
                 <a:latin typeface="Rubik"/>
+                <a:cs typeface="Rubik"/>
               </a:rPr>
               <a:t>בואו נתחיל</a:t>
             </a:r>
@@ -5824,6 +6305,7 @@
                   <a:srgbClr val="6A6D70"/>
                 </a:solidFill>
                 <a:latin typeface="Rubik"/>
+                <a:cs typeface="Rubik"/>
               </a:rPr>
               <a:t>שיחת היכרות קצרה וללא התחייבות</a:t>
             </a:r>
@@ -5847,14 +6329,20 @@
             </a:avLst>
           </a:prstGeom>
           <a:solidFill>
-            <a:srgbClr val="F7F9FC"/>
+            <a:srgbClr val="FFFFFF"/>
           </a:solidFill>
           <a:ln w="12700">
             <a:solidFill>
               <a:srgbClr val="E4EAF1"/>
             </a:solidFill>
           </a:ln>
-          <a:effectLst/>
+          <a:effectLst>
+            <a:outerShdw blurRad="114300" dist="25400" dir="5400000" rotWithShape="0">
+              <a:srgbClr val="0F2E52">
+                <a:alpha val="8000"/>
+              </a:srgbClr>
+            </a:outerShdw>
+          </a:effectLst>
         </p:spPr>
         <p:style>
           <a:lnRef idx="1">
@@ -5919,10 +6407,6 @@
           <a:lstStyle/>
           <a:p>
             <a:pPr algn="ctr"/>
-            <a:r>
-              <a:rPr sz="3800"/>
-              <a:t>📞</a:t>
-            </a:r>
           </a:p>
         </p:txBody>
       </p:sp>
@@ -5955,6 +6439,7 @@
                   <a:srgbClr val="121213"/>
                 </a:solidFill>
                 <a:latin typeface="Rubik"/>
+                <a:cs typeface="Rubik"/>
               </a:rPr>
               <a:t>דנה קוניק</a:t>
             </a:r>
@@ -5990,6 +6475,7 @@
                   <a:srgbClr val="0F2E52"/>
                 </a:solidFill>
                 <a:latin typeface="Heebo"/>
+                <a:cs typeface="Heebo"/>
               </a:rPr>
               <a:t>053-700-4934</a:t>
             </a:r>
@@ -6025,12 +6511,37 @@
                   <a:srgbClr val="6A6D70"/>
                 </a:solidFill>
                 <a:latin typeface="Rubik"/>
+                <a:cs typeface="Rubik"/>
               </a:rPr>
               <a:t>בטלפון או בוואטסאפ</a:t>
             </a:r>
           </a:p>
         </p:txBody>
       </p:sp>
+      <p:pic>
+        <p:nvPicPr>
+          <p:cNvPr id="9" name="Picture 8" descr="phone_call.png"/>
+          <p:cNvPicPr>
+            <a:picLocks noChangeAspect="1"/>
+          </p:cNvPicPr>
+          <p:nvPr/>
+        </p:nvPicPr>
+        <p:blipFill>
+          <a:blip r:embed="rId2"/>
+          <a:stretch>
+            <a:fillRect/>
+          </a:stretch>
+        </p:blipFill>
+        <p:spPr>
+          <a:xfrm>
+            <a:off x="5870448" y="3017520"/>
+            <a:ext cx="457200" cy="457200"/>
+          </a:xfrm>
+          <a:prstGeom prst="rect">
+            <a:avLst/>
+          </a:prstGeom>
+        </p:spPr>
+      </p:pic>
     </p:spTree>
   </p:cSld>
   <p:clrMapOvr>
@@ -6224,6 +6735,7 @@
                   <a:srgbClr val="FFFFFF"/>
                 </a:solidFill>
                 <a:latin typeface="Rubik"/>
+                <a:cs typeface="Rubik"/>
               </a:rPr>
               <a:t>תודה!</a:t>
             </a:r>
@@ -6259,6 +6771,7 @@
                   <a:srgbClr val="9CC7F5"/>
                 </a:solidFill>
                 <a:latin typeface="Rubik"/>
+                <a:cs typeface="Rubik"/>
               </a:rPr>
               <a:t>טק בגובה העיניים · דנה קוניק</a:t>
             </a:r>
